--- a/20260826_特別プランのご提供方針.pptx
+++ b/20260826_特別プランのご提供方針.pptx
@@ -2856,73 +2856,14 @@
       </p:sp>
       <p:sp>
         <p:nvSpPr>
-          <p:cNvPr id="7" name="TextBox 6"/>
-          <p:cNvSpPr txBox="1"/>
-          <p:nvPr/>
-        </p:nvSpPr>
-        <p:spPr>
-          <a:xfrm>
-            <a:off x="384048" y="603504"/>
-            <a:ext cx="9162288" cy="731520"/>
-          </a:xfrm>
-          <a:prstGeom prst="rect">
-            <a:avLst/>
-          </a:prstGeom>
-          <a:noFill/>
-        </p:spPr>
-        <p:txBody>
-          <a:bodyPr wrap="square" lIns="0" rIns="0" tIns="27432" bIns="27432" anchor="ctr">
-            <a:spAutoFit/>
-          </a:bodyPr>
-          <a:lstStyle/>
-          <a:p>
-            <a:pPr algn="ctr"/>
-            <a:r>
-              <a:rPr sz="1400" b="1">
-                <a:solidFill>
-                  <a:srgbClr val="333333"/>
-                </a:solidFill>
-                <a:latin typeface="メイリオ"/>
-                <a:ea typeface="メイリオ"/>
-                <a:cs typeface="メイリオ"/>
-              </a:rPr>
-              <a:t>10月から原則、特別プランのご提供は難しく、</a:t>
-            </a:r>
-            <a:r>
-              <a:rPr sz="1400" b="1">
-                <a:solidFill>
-                  <a:srgbClr val="C00000"/>
-                </a:solidFill>
-                <a:latin typeface="メイリオ"/>
-                <a:ea typeface="メイリオ"/>
-                <a:cs typeface="メイリオ"/>
-              </a:rPr>
-              <a:t>11月以降</a:t>
-            </a:r>
-            <a:r>
-              <a:rPr sz="1400" b="1">
-                <a:solidFill>
-                  <a:srgbClr val="333333"/>
-                </a:solidFill>
-                <a:latin typeface="メイリオ"/>
-                <a:ea typeface="メイリオ"/>
-                <a:cs typeface="メイリオ"/>
-              </a:rPr>
-              <a:t>に各社様ごとの調整をいたします</a:t>
-            </a:r>
-          </a:p>
-        </p:txBody>
-      </p:sp>
-      <p:sp>
-        <p:nvSpPr>
-          <p:cNvPr id="8" name="Rectangle 7"/>
+          <p:cNvPr id="7" name="Rectangle 6"/>
           <p:cNvSpPr/>
           <p:nvPr/>
         </p:nvSpPr>
         <p:spPr>
           <a:xfrm>
-            <a:off x="457200" y="1737360"/>
-            <a:ext cx="8988552" cy="1133856"/>
+            <a:off x="457200" y="1783080"/>
+            <a:ext cx="8988552" cy="1874519"/>
           </a:xfrm>
           <a:prstGeom prst="rect">
             <a:avLst/>
@@ -2961,14 +2902,14 @@
       </p:sp>
       <p:sp>
         <p:nvSpPr>
-          <p:cNvPr id="9" name="Rectangle 8"/>
+          <p:cNvPr id="8" name="Rectangle 7"/>
           <p:cNvSpPr/>
           <p:nvPr/>
         </p:nvSpPr>
         <p:spPr>
           <a:xfrm>
-            <a:off x="749808" y="2093976"/>
-            <a:ext cx="1225296" cy="420624"/>
+            <a:off x="777240" y="2496312"/>
+            <a:ext cx="1325880" cy="457200"/>
           </a:xfrm>
           <a:prstGeom prst="rect">
             <a:avLst/>
@@ -3016,14 +2957,14 @@
       </p:sp>
       <p:sp>
         <p:nvSpPr>
-          <p:cNvPr id="10" name="TextBox 9"/>
+          <p:cNvPr id="9" name="TextBox 8"/>
           <p:cNvSpPr txBox="1"/>
           <p:nvPr/>
         </p:nvSpPr>
         <p:spPr>
           <a:xfrm>
-            <a:off x="2212848" y="1773936"/>
-            <a:ext cx="6949440" cy="1060704"/>
+            <a:off x="2377440" y="1783080"/>
+            <a:ext cx="6766560" cy="1874519"/>
           </a:xfrm>
           <a:prstGeom prst="rect">
             <a:avLst/>
@@ -3053,58 +2994,14 @@
       </p:sp>
       <p:sp>
         <p:nvSpPr>
-          <p:cNvPr id="11" name="Down Arrow 10"/>
+          <p:cNvPr id="10" name="Rectangle 9"/>
           <p:cNvSpPr/>
           <p:nvPr/>
         </p:nvSpPr>
         <p:spPr>
           <a:xfrm>
-            <a:off x="4745736" y="2999232"/>
-            <a:ext cx="411480" cy="384048"/>
-          </a:xfrm>
-          <a:prstGeom prst="downArrow">
-            <a:avLst/>
-          </a:prstGeom>
-          <a:solidFill>
-            <a:srgbClr val="D9D9D9"/>
-          </a:solidFill>
-          <a:ln>
-            <a:noFill/>
-          </a:ln>
-          <a:effectLst/>
-        </p:spPr>
-        <p:style>
-          <a:lnRef idx="1">
-            <a:schemeClr val="accent1"/>
-          </a:lnRef>
-          <a:fillRef idx="3">
-            <a:schemeClr val="accent1"/>
-          </a:fillRef>
-          <a:effectRef idx="2">
-            <a:schemeClr val="accent1"/>
-          </a:effectRef>
-          <a:fontRef idx="minor">
-            <a:schemeClr val="lt1"/>
-          </a:fontRef>
-        </p:style>
-        <p:txBody>
-          <a:bodyPr rtlCol="0" anchor="ctr" wrap="square"/>
-          <a:lstStyle/>
-          <a:p>
-            <a:pPr algn="ctr"/>
-          </a:p>
-        </p:txBody>
-      </p:sp>
-      <p:sp>
-        <p:nvSpPr>
-          <p:cNvPr id="12" name="Rectangle 11"/>
-          <p:cNvSpPr/>
-          <p:nvPr/>
-        </p:nvSpPr>
-        <p:spPr>
-          <a:xfrm>
-            <a:off x="457200" y="3529584"/>
-            <a:ext cx="8988552" cy="2468880"/>
+            <a:off x="457200" y="4069080"/>
+            <a:ext cx="8988552" cy="1874519"/>
           </a:xfrm>
           <a:prstGeom prst="rect">
             <a:avLst/>
@@ -3143,14 +3040,14 @@
       </p:sp>
       <p:sp>
         <p:nvSpPr>
-          <p:cNvPr id="13" name="Rectangle 12"/>
+          <p:cNvPr id="11" name="Rectangle 10"/>
           <p:cNvSpPr/>
           <p:nvPr/>
         </p:nvSpPr>
         <p:spPr>
           <a:xfrm>
-            <a:off x="749808" y="3803904"/>
-            <a:ext cx="1225296" cy="420624"/>
+            <a:off x="777240" y="4782312"/>
+            <a:ext cx="1325880" cy="457200"/>
           </a:xfrm>
           <a:prstGeom prst="rect">
             <a:avLst/>
@@ -3198,14 +3095,14 @@
       </p:sp>
       <p:sp>
         <p:nvSpPr>
-          <p:cNvPr id="14" name="TextBox 13"/>
+          <p:cNvPr id="12" name="TextBox 11"/>
           <p:cNvSpPr txBox="1"/>
           <p:nvPr/>
         </p:nvSpPr>
         <p:spPr>
           <a:xfrm>
-            <a:off x="2212848" y="3694176"/>
-            <a:ext cx="6949440" cy="658368"/>
+            <a:off x="2377440" y="4069080"/>
+            <a:ext cx="6766560" cy="1874519"/>
           </a:xfrm>
           <a:prstGeom prst="rect">
             <a:avLst/>
@@ -3218,9 +3115,13 @@
           </a:bodyPr>
           <a:lstStyle/>
           <a:p>
-            <a:pPr algn="l"/>
+            <a:pPr algn="l">
+              <a:lnSpc>
+                <a:spcPct val="125000"/>
+              </a:lnSpc>
+            </a:pPr>
             <a:r>
-              <a:rPr sz="1550" b="1">
+              <a:rPr sz="1800" b="1">
                 <a:solidFill>
                   <a:srgbClr val="333333"/>
                 </a:solidFill>
@@ -3232,9 +3133,13 @@
             </a:r>
           </a:p>
           <a:p>
-            <a:pPr algn="l"/>
+            <a:pPr algn="l">
+              <a:lnSpc>
+                <a:spcPct val="125000"/>
+              </a:lnSpc>
+            </a:pPr>
             <a:r>
-              <a:rPr sz="1550" b="1">
+              <a:rPr sz="1800" b="1">
                 <a:solidFill>
                   <a:srgbClr val="333333"/>
                 </a:solidFill>
@@ -3243,340 +3148,6 @@
                 <a:cs typeface="メイリオ"/>
               </a:rPr>
               <a:t>特別プランの調整をいたします。</a:t>
-            </a:r>
-          </a:p>
-        </p:txBody>
-      </p:sp>
-      <p:sp>
-        <p:nvSpPr>
-          <p:cNvPr id="15" name="TextBox 14"/>
-          <p:cNvSpPr txBox="1"/>
-          <p:nvPr/>
-        </p:nvSpPr>
-        <p:spPr>
-          <a:xfrm>
-            <a:off x="822960" y="4480560"/>
-            <a:ext cx="3657600" cy="274320"/>
-          </a:xfrm>
-          <a:prstGeom prst="rect">
-            <a:avLst/>
-          </a:prstGeom>
-          <a:noFill/>
-        </p:spPr>
-        <p:txBody>
-          <a:bodyPr wrap="square" lIns="0" rIns="54864" tIns="27432" bIns="27432" anchor="ctr">
-            <a:spAutoFit/>
-          </a:bodyPr>
-          <a:lstStyle/>
-          <a:p>
-            <a:pPr algn="l"/>
-            <a:r>
-              <a:rPr sz="1200" b="1">
-                <a:solidFill>
-                  <a:srgbClr val="1F285A"/>
-                </a:solidFill>
-                <a:latin typeface="メイリオ"/>
-                <a:ea typeface="メイリオ"/>
-                <a:cs typeface="メイリオ"/>
-              </a:rPr>
-              <a:t>調整のポイント</a:t>
-            </a:r>
-          </a:p>
-        </p:txBody>
-      </p:sp>
-      <p:sp>
-        <p:nvSpPr>
-          <p:cNvPr id="16" name="Rounded Rectangle 15"/>
-          <p:cNvSpPr/>
-          <p:nvPr/>
-        </p:nvSpPr>
-        <p:spPr>
-          <a:xfrm>
-            <a:off x="822960" y="4809744"/>
-            <a:ext cx="2514600" cy="914400"/>
-          </a:xfrm>
-          <a:prstGeom prst="roundRect">
-            <a:avLst/>
-          </a:prstGeom>
-          <a:solidFill>
-            <a:srgbClr val="FFFFFF"/>
-          </a:solidFill>
-          <a:ln w="12700">
-            <a:solidFill>
-              <a:srgbClr val="1F285A"/>
-            </a:solidFill>
-          </a:ln>
-          <a:effectLst/>
-        </p:spPr>
-        <p:style>
-          <a:lnRef idx="1">
-            <a:schemeClr val="accent1"/>
-          </a:lnRef>
-          <a:fillRef idx="3">
-            <a:schemeClr val="accent1"/>
-          </a:fillRef>
-          <a:effectRef idx="2">
-            <a:schemeClr val="accent1"/>
-          </a:effectRef>
-          <a:fontRef idx="minor">
-            <a:schemeClr val="lt1"/>
-          </a:fontRef>
-        </p:style>
-        <p:txBody>
-          <a:bodyPr rtlCol="0" anchor="ctr" wrap="square" lIns="54864" rIns="54864" tIns="0" bIns="0"/>
-          <a:lstStyle/>
-          <a:p>
-            <a:pPr algn="ctr">
-              <a:spcAft>
-                <a:spcPts val="200"/>
-              </a:spcAft>
-            </a:pPr>
-            <a:r>
-              <a:rPr sz="1050">
-                <a:solidFill>
-                  <a:srgbClr val="808080"/>
-                </a:solidFill>
-                <a:latin typeface="メイリオ"/>
-                <a:ea typeface="メイリオ"/>
-                <a:cs typeface="メイリオ"/>
-              </a:rPr>
-              <a:t>各社様の</a:t>
-            </a:r>
-          </a:p>
-          <a:p>
-            <a:pPr algn="ctr"/>
-            <a:r>
-              <a:rPr sz="1600" b="1">
-                <a:solidFill>
-                  <a:srgbClr val="1F285A"/>
-                </a:solidFill>
-                <a:latin typeface="メイリオ"/>
-                <a:ea typeface="メイリオ"/>
-                <a:cs typeface="メイリオ"/>
-              </a:rPr>
-              <a:t>配信金額</a:t>
-            </a:r>
-          </a:p>
-        </p:txBody>
-      </p:sp>
-      <p:sp>
-        <p:nvSpPr>
-          <p:cNvPr id="17" name="TextBox 16"/>
-          <p:cNvSpPr txBox="1"/>
-          <p:nvPr/>
-        </p:nvSpPr>
-        <p:spPr>
-          <a:xfrm>
-            <a:off x="3337560" y="4809744"/>
-            <a:ext cx="548640" cy="914400"/>
-          </a:xfrm>
-          <a:prstGeom prst="rect">
-            <a:avLst/>
-          </a:prstGeom>
-          <a:noFill/>
-        </p:spPr>
-        <p:txBody>
-          <a:bodyPr wrap="square" lIns="0" rIns="0" tIns="27432" bIns="27432" anchor="ctr">
-            <a:spAutoFit/>
-          </a:bodyPr>
-          <a:lstStyle/>
-          <a:p>
-            <a:pPr algn="ctr"/>
-            <a:r>
-              <a:rPr sz="2000" b="1">
-                <a:solidFill>
-                  <a:srgbClr val="808080"/>
-                </a:solidFill>
-                <a:latin typeface="メイリオ"/>
-                <a:ea typeface="メイリオ"/>
-                <a:cs typeface="メイリオ"/>
-              </a:rPr>
-              <a:t>×</a:t>
-            </a:r>
-          </a:p>
-        </p:txBody>
-      </p:sp>
-      <p:sp>
-        <p:nvSpPr>
-          <p:cNvPr id="18" name="Rounded Rectangle 17"/>
-          <p:cNvSpPr/>
-          <p:nvPr/>
-        </p:nvSpPr>
-        <p:spPr>
-          <a:xfrm>
-            <a:off x="3886200" y="4809744"/>
-            <a:ext cx="2514600" cy="914400"/>
-          </a:xfrm>
-          <a:prstGeom prst="roundRect">
-            <a:avLst/>
-          </a:prstGeom>
-          <a:solidFill>
-            <a:srgbClr val="FFFFFF"/>
-          </a:solidFill>
-          <a:ln w="12700">
-            <a:solidFill>
-              <a:srgbClr val="1F285A"/>
-            </a:solidFill>
-          </a:ln>
-          <a:effectLst/>
-        </p:spPr>
-        <p:style>
-          <a:lnRef idx="1">
-            <a:schemeClr val="accent1"/>
-          </a:lnRef>
-          <a:fillRef idx="3">
-            <a:schemeClr val="accent1"/>
-          </a:fillRef>
-          <a:effectRef idx="2">
-            <a:schemeClr val="accent1"/>
-          </a:effectRef>
-          <a:fontRef idx="minor">
-            <a:schemeClr val="lt1"/>
-          </a:fontRef>
-        </p:style>
-        <p:txBody>
-          <a:bodyPr rtlCol="0" anchor="ctr" wrap="square" lIns="54864" rIns="54864" tIns="0" bIns="0"/>
-          <a:lstStyle/>
-          <a:p>
-            <a:pPr algn="ctr">
-              <a:spcAft>
-                <a:spcPts val="200"/>
-              </a:spcAft>
-            </a:pPr>
-            <a:r>
-              <a:rPr sz="1050">
-                <a:solidFill>
-                  <a:srgbClr val="808080"/>
-                </a:solidFill>
-                <a:latin typeface="メイリオ"/>
-                <a:ea typeface="メイリオ"/>
-                <a:cs typeface="メイリオ"/>
-              </a:rPr>
-              <a:t>媒体側の</a:t>
-            </a:r>
-          </a:p>
-          <a:p>
-            <a:pPr algn="ctr"/>
-            <a:r>
-              <a:rPr sz="1600" b="1">
-                <a:solidFill>
-                  <a:srgbClr val="1F285A"/>
-                </a:solidFill>
-                <a:latin typeface="メイリオ"/>
-                <a:ea typeface="メイリオ"/>
-                <a:cs typeface="メイリオ"/>
-              </a:rPr>
-              <a:t>媒体インセンティブ</a:t>
-            </a:r>
-          </a:p>
-        </p:txBody>
-      </p:sp>
-      <p:sp>
-        <p:nvSpPr>
-          <p:cNvPr id="19" name="TextBox 18"/>
-          <p:cNvSpPr txBox="1"/>
-          <p:nvPr/>
-        </p:nvSpPr>
-        <p:spPr>
-          <a:xfrm>
-            <a:off x="6400800" y="4809744"/>
-            <a:ext cx="548640" cy="914400"/>
-          </a:xfrm>
-          <a:prstGeom prst="rect">
-            <a:avLst/>
-          </a:prstGeom>
-          <a:noFill/>
-        </p:spPr>
-        <p:txBody>
-          <a:bodyPr wrap="square" lIns="0" rIns="0" tIns="27432" bIns="27432" anchor="ctr">
-            <a:spAutoFit/>
-          </a:bodyPr>
-          <a:lstStyle/>
-          <a:p>
-            <a:pPr algn="ctr"/>
-            <a:r>
-              <a:rPr sz="2000" b="1">
-                <a:solidFill>
-                  <a:srgbClr val="808080"/>
-                </a:solidFill>
-                <a:latin typeface="メイリオ"/>
-                <a:ea typeface="メイリオ"/>
-                <a:cs typeface="メイリオ"/>
-              </a:rPr>
-              <a:t>→</a:t>
-            </a:r>
-          </a:p>
-        </p:txBody>
-      </p:sp>
-      <p:sp>
-        <p:nvSpPr>
-          <p:cNvPr id="20" name="Rounded Rectangle 19"/>
-          <p:cNvSpPr/>
-          <p:nvPr/>
-        </p:nvSpPr>
-        <p:spPr>
-          <a:xfrm>
-            <a:off x="6949440" y="4809744"/>
-            <a:ext cx="2148840" cy="914400"/>
-          </a:xfrm>
-          <a:prstGeom prst="roundRect">
-            <a:avLst/>
-          </a:prstGeom>
-          <a:solidFill>
-            <a:srgbClr val="1F285A"/>
-          </a:solidFill>
-          <a:ln>
-            <a:noFill/>
-          </a:ln>
-          <a:effectLst/>
-        </p:spPr>
-        <p:style>
-          <a:lnRef idx="1">
-            <a:schemeClr val="accent1"/>
-          </a:lnRef>
-          <a:fillRef idx="3">
-            <a:schemeClr val="accent1"/>
-          </a:fillRef>
-          <a:effectRef idx="2">
-            <a:schemeClr val="accent1"/>
-          </a:effectRef>
-          <a:fontRef idx="minor">
-            <a:schemeClr val="lt1"/>
-          </a:fontRef>
-        </p:style>
-        <p:txBody>
-          <a:bodyPr rtlCol="0" anchor="ctr" wrap="square" lIns="54864" rIns="54864" tIns="0" bIns="0"/>
-          <a:lstStyle/>
-          <a:p>
-            <a:pPr algn="ctr">
-              <a:spcAft>
-                <a:spcPts val="200"/>
-              </a:spcAft>
-            </a:pPr>
-            <a:r>
-              <a:rPr sz="1050">
-                <a:solidFill>
-                  <a:srgbClr val="C8D0E8"/>
-                </a:solidFill>
-                <a:latin typeface="メイリオ"/>
-                <a:ea typeface="メイリオ"/>
-                <a:cs typeface="メイリオ"/>
-              </a:rPr>
-              <a:t>各社様ごとに</a:t>
-            </a:r>
-          </a:p>
-          <a:p>
-            <a:pPr algn="ctr"/>
-            <a:r>
-              <a:rPr sz="1500" b="1">
-                <a:solidFill>
-                  <a:srgbClr val="FFFFFF"/>
-                </a:solidFill>
-                <a:latin typeface="メイリオ"/>
-                <a:ea typeface="メイリオ"/>
-                <a:cs typeface="メイリオ"/>
-              </a:rPr>
-              <a:t>特別プランを調整</a:t>
             </a:r>
           </a:p>
         </p:txBody>

--- a/20260826_特別プランのご提供方針.pptx
+++ b/20260826_特別プランのご提供方針.pptx
@@ -2909,13 +2909,13 @@
         <p:spPr>
           <a:xfrm>
             <a:off x="777240" y="2496312"/>
-            <a:ext cx="1325880" cy="457200"/>
+            <a:ext cx="1554480" cy="457200"/>
           </a:xfrm>
           <a:prstGeom prst="rect">
             <a:avLst/>
           </a:prstGeom>
           <a:solidFill>
-            <a:srgbClr val="C00000"/>
+            <a:srgbClr val="1F285A"/>
           </a:solidFill>
           <a:ln>
             <a:noFill/>
@@ -2950,7 +2950,7 @@
                 <a:ea typeface="メイリオ"/>
                 <a:cs typeface="メイリオ"/>
               </a:rPr>
-              <a:t>10月〜</a:t>
+              <a:t>ご案内</a:t>
             </a:r>
           </a:p>
         </p:txBody>
@@ -2963,7 +2963,7 @@
         </p:nvSpPr>
         <p:spPr>
           <a:xfrm>
-            <a:off x="2377440" y="1783080"/>
+            <a:off x="2514600" y="1783080"/>
             <a:ext cx="6766560" cy="1874519"/>
           </a:xfrm>
           <a:prstGeom prst="rect">
@@ -2979,7 +2979,7 @@
           <a:p>
             <a:pPr algn="l"/>
             <a:r>
-              <a:rPr sz="2100" b="1">
+              <a:rPr sz="1800" b="1">
                 <a:solidFill>
                   <a:srgbClr val="333333"/>
                 </a:solidFill>
@@ -2987,7 +2987,29 @@
                 <a:ea typeface="メイリオ"/>
                 <a:cs typeface="メイリオ"/>
               </a:rPr>
-              <a:t>原則、特別プランのご提供は難しいです。</a:t>
+              <a:t>10月〜のプランではなく、</a:t>
+            </a:r>
+            <a:r>
+              <a:rPr sz="1800" b="1">
+                <a:solidFill>
+                  <a:srgbClr val="C00000"/>
+                </a:solidFill>
+                <a:latin typeface="メイリオ"/>
+                <a:ea typeface="メイリオ"/>
+                <a:cs typeface="メイリオ"/>
+              </a:rPr>
+              <a:t>11月から</a:t>
+            </a:r>
+            <a:r>
+              <a:rPr sz="1800" b="1">
+                <a:solidFill>
+                  <a:srgbClr val="333333"/>
+                </a:solidFill>
+                <a:latin typeface="メイリオ"/>
+                <a:ea typeface="メイリオ"/>
+                <a:cs typeface="メイリオ"/>
+              </a:rPr>
+              <a:t>のご案内になります。</a:t>
             </a:r>
           </a:p>
         </p:txBody>
@@ -3047,7 +3069,7 @@
         <p:spPr>
           <a:xfrm>
             <a:off x="777240" y="4782312"/>
-            <a:ext cx="1325880" cy="457200"/>
+            <a:ext cx="1554480" cy="457200"/>
           </a:xfrm>
           <a:prstGeom prst="rect">
             <a:avLst/>
@@ -3080,7 +3102,7 @@
           <a:p>
             <a:pPr algn="ctr"/>
             <a:r>
-              <a:rPr sz="1400" b="1">
+              <a:rPr sz="1300" b="1">
                 <a:solidFill>
                   <a:srgbClr val="FFFFFF"/>
                 </a:solidFill>
@@ -3088,7 +3110,7 @@
                 <a:ea typeface="メイリオ"/>
                 <a:cs typeface="メイリオ"/>
               </a:rPr>
-              <a:t>11月以降</a:t>
+              <a:t>弊社のご対応</a:t>
             </a:r>
           </a:p>
         </p:txBody>
@@ -3101,7 +3123,7 @@
         </p:nvSpPr>
         <p:spPr>
           <a:xfrm>
-            <a:off x="2377440" y="4069080"/>
+            <a:off x="2514600" y="4069080"/>
             <a:ext cx="6766560" cy="1874519"/>
           </a:xfrm>
           <a:prstGeom prst="rect">
